--- a/public/fun/pack/pptx/birthday/돌잔치_03_사진중심_교정벚나무.pptx
+++ b/public/fun/pack/pptx/birthday/돌잔치_03_사진중심_교정벚나무.pptx
@@ -3347,7 +3347,7 @@
             <a:r>
               <a:rPr sz="4000" b="1" i="0">
                 <a:solidFill>
-                  <a:srgbClr val="9E2E4A"/>
+                  <a:srgbClr val="721D32"/>
                 </a:solidFill>
               </a:rPr>
               <a:t>첫 번째 생일</a:t>
@@ -3385,7 +3385,7 @@
             <a:r>
               <a:rPr sz="1700" b="0" i="1">
                 <a:solidFill>
-                  <a:srgbClr val="9E2E4A"/>
+                  <a:srgbClr val="721D32"/>
                 </a:solidFill>
               </a:rPr>
               <a:t>한 해 동안 찍은 사진 중에 골랐습니다</a:t>
@@ -3460,7 +3460,7 @@
     <p:bg>
       <p:bgPr>
         <a:solidFill>
-          <a:srgbClr val="D1617D"/>
+          <a:srgbClr val="DB3D65"/>
         </a:solidFill>
         <a:effectLst/>
       </p:bgPr>
@@ -3533,7 +3533,7 @@
             <a:r>
               <a:rPr sz="3000" b="1" i="0">
                 <a:solidFill>
-                  <a:srgbClr val="9E2E4A"/>
+                  <a:srgbClr val="721D32"/>
                 </a:solidFill>
               </a:rPr>
               <a:t>우리 아기를 소개합니다</a:t>
@@ -3558,11 +3558,11 @@
             </a:avLst>
           </a:prstGeom>
           <a:solidFill>
-            <a:srgbClr val="F3CED7"/>
+            <a:srgbClr val="F7D4DD"/>
           </a:solidFill>
           <a:ln w="19050">
             <a:solidFill>
-              <a:srgbClr val="D1617D"/>
+              <a:srgbClr val="DB3D65"/>
             </a:solidFill>
             <a:prstDash val="dash"/>
           </a:ln>
@@ -3581,7 +3581,7 @@
             <a:r>
               <a:rPr sz="1400" b="0" i="0">
                 <a:solidFill>
-                  <a:srgbClr val="9E2E4A"/>
+                  <a:srgbClr val="721D32"/>
                 </a:solidFill>
               </a:rPr>
               <a:t>아기 사진을 넣어 주세요</a:t>
@@ -3621,7 +3621,7 @@
                       <a:r>
                         <a:rPr sz="1500" b="1">
                           <a:solidFill>
-                            <a:srgbClr val="9E2E4A"/>
+                            <a:srgbClr val="721D32"/>
                           </a:solidFill>
                         </a:rPr>
                         <a:t>이름</a:t>
@@ -3631,30 +3631,30 @@
                   <a:tcPr anchor="ctr" marL="73152" marR="73152">
                     <a:lnL w="9525" cap="flat" cmpd="sng" algn="ctr">
                       <a:solidFill>
-                        <a:srgbClr val="F3CED7"/>
+                        <a:srgbClr val="F7D4DD"/>
                       </a:solidFill>
                       <a:prstDash val="solid"/>
                     </a:lnL>
                     <a:lnR w="9525" cap="flat" cmpd="sng" algn="ctr">
                       <a:solidFill>
-                        <a:srgbClr val="F3CED7"/>
+                        <a:srgbClr val="F7D4DD"/>
                       </a:solidFill>
                       <a:prstDash val="solid"/>
                     </a:lnR>
                     <a:lnT w="9525" cap="flat" cmpd="sng" algn="ctr">
                       <a:solidFill>
-                        <a:srgbClr val="F3CED7"/>
+                        <a:srgbClr val="F7D4DD"/>
                       </a:solidFill>
                       <a:prstDash val="solid"/>
                     </a:lnT>
                     <a:lnB w="9525" cap="flat" cmpd="sng" algn="ctr">
                       <a:solidFill>
-                        <a:srgbClr val="F3CED7"/>
+                        <a:srgbClr val="F7D4DD"/>
                       </a:solidFill>
                       <a:prstDash val="solid"/>
                     </a:lnB>
                     <a:solidFill>
-                      <a:srgbClr val="F3CED7"/>
+                      <a:srgbClr val="F7D4DD"/>
                     </a:solidFill>
                   </a:tcPr>
                 </a:tc>
@@ -3677,30 +3677,30 @@
                   <a:tcPr anchor="ctr" marL="73152" marR="73152">
                     <a:lnL w="9525" cap="flat" cmpd="sng" algn="ctr">
                       <a:solidFill>
-                        <a:srgbClr val="F3CED7"/>
+                        <a:srgbClr val="F7D4DD"/>
                       </a:solidFill>
                       <a:prstDash val="solid"/>
                     </a:lnL>
                     <a:lnR w="9525" cap="flat" cmpd="sng" algn="ctr">
                       <a:solidFill>
-                        <a:srgbClr val="F3CED7"/>
+                        <a:srgbClr val="F7D4DD"/>
                       </a:solidFill>
                       <a:prstDash val="solid"/>
                     </a:lnR>
                     <a:lnT w="9525" cap="flat" cmpd="sng" algn="ctr">
                       <a:solidFill>
-                        <a:srgbClr val="F3CED7"/>
+                        <a:srgbClr val="F7D4DD"/>
                       </a:solidFill>
                       <a:prstDash val="solid"/>
                     </a:lnT>
                     <a:lnB w="9525" cap="flat" cmpd="sng" algn="ctr">
                       <a:solidFill>
-                        <a:srgbClr val="F3CED7"/>
+                        <a:srgbClr val="F7D4DD"/>
                       </a:solidFill>
                       <a:prstDash val="solid"/>
                     </a:lnB>
                     <a:solidFill>
-                      <a:srgbClr val="FAEFF2"/>
+                      <a:srgbClr val="FCF3F5"/>
                     </a:solidFill>
                   </a:tcPr>
                 </a:tc>
@@ -3715,7 +3715,7 @@
                       <a:r>
                         <a:rPr sz="1500" b="1">
                           <a:solidFill>
-                            <a:srgbClr val="9E2E4A"/>
+                            <a:srgbClr val="721D32"/>
                           </a:solidFill>
                         </a:rPr>
                         <a:t>생일</a:t>
@@ -3725,30 +3725,30 @@
                   <a:tcPr anchor="ctr" marL="73152" marR="73152">
                     <a:lnL w="9525" cap="flat" cmpd="sng" algn="ctr">
                       <a:solidFill>
-                        <a:srgbClr val="F3CED7"/>
+                        <a:srgbClr val="F7D4DD"/>
                       </a:solidFill>
                       <a:prstDash val="solid"/>
                     </a:lnL>
                     <a:lnR w="9525" cap="flat" cmpd="sng" algn="ctr">
                       <a:solidFill>
-                        <a:srgbClr val="F3CED7"/>
+                        <a:srgbClr val="F7D4DD"/>
                       </a:solidFill>
                       <a:prstDash val="solid"/>
                     </a:lnR>
                     <a:lnT w="9525" cap="flat" cmpd="sng" algn="ctr">
                       <a:solidFill>
-                        <a:srgbClr val="F3CED7"/>
+                        <a:srgbClr val="F7D4DD"/>
                       </a:solidFill>
                       <a:prstDash val="solid"/>
                     </a:lnT>
                     <a:lnB w="9525" cap="flat" cmpd="sng" algn="ctr">
                       <a:solidFill>
-                        <a:srgbClr val="F3CED7"/>
+                        <a:srgbClr val="F7D4DD"/>
                       </a:solidFill>
                       <a:prstDash val="solid"/>
                     </a:lnB>
                     <a:solidFill>
-                      <a:srgbClr val="F3CED7"/>
+                      <a:srgbClr val="F7D4DD"/>
                     </a:solidFill>
                   </a:tcPr>
                 </a:tc>
@@ -3771,25 +3771,25 @@
                   <a:tcPr anchor="ctr" marL="73152" marR="73152">
                     <a:lnL w="9525" cap="flat" cmpd="sng" algn="ctr">
                       <a:solidFill>
-                        <a:srgbClr val="F3CED7"/>
+                        <a:srgbClr val="F7D4DD"/>
                       </a:solidFill>
                       <a:prstDash val="solid"/>
                     </a:lnL>
                     <a:lnR w="9525" cap="flat" cmpd="sng" algn="ctr">
                       <a:solidFill>
-                        <a:srgbClr val="F3CED7"/>
+                        <a:srgbClr val="F7D4DD"/>
                       </a:solidFill>
                       <a:prstDash val="solid"/>
                     </a:lnR>
                     <a:lnT w="9525" cap="flat" cmpd="sng" algn="ctr">
                       <a:solidFill>
-                        <a:srgbClr val="F3CED7"/>
+                        <a:srgbClr val="F7D4DD"/>
                       </a:solidFill>
                       <a:prstDash val="solid"/>
                     </a:lnT>
                     <a:lnB w="9525" cap="flat" cmpd="sng" algn="ctr">
                       <a:solidFill>
-                        <a:srgbClr val="F3CED7"/>
+                        <a:srgbClr val="F7D4DD"/>
                       </a:solidFill>
                       <a:prstDash val="solid"/>
                     </a:lnB>
@@ -3809,7 +3809,7 @@
                       <a:r>
                         <a:rPr sz="1500" b="1">
                           <a:solidFill>
-                            <a:srgbClr val="9E2E4A"/>
+                            <a:srgbClr val="721D32"/>
                           </a:solidFill>
                         </a:rPr>
                         <a:t>키 · 몸무게</a:t>
@@ -3819,30 +3819,30 @@
                   <a:tcPr anchor="ctr" marL="73152" marR="73152">
                     <a:lnL w="9525" cap="flat" cmpd="sng" algn="ctr">
                       <a:solidFill>
-                        <a:srgbClr val="F3CED7"/>
+                        <a:srgbClr val="F7D4DD"/>
                       </a:solidFill>
                       <a:prstDash val="solid"/>
                     </a:lnL>
                     <a:lnR w="9525" cap="flat" cmpd="sng" algn="ctr">
                       <a:solidFill>
-                        <a:srgbClr val="F3CED7"/>
+                        <a:srgbClr val="F7D4DD"/>
                       </a:solidFill>
                       <a:prstDash val="solid"/>
                     </a:lnR>
                     <a:lnT w="9525" cap="flat" cmpd="sng" algn="ctr">
                       <a:solidFill>
-                        <a:srgbClr val="F3CED7"/>
+                        <a:srgbClr val="F7D4DD"/>
                       </a:solidFill>
                       <a:prstDash val="solid"/>
                     </a:lnT>
                     <a:lnB w="9525" cap="flat" cmpd="sng" algn="ctr">
                       <a:solidFill>
-                        <a:srgbClr val="F3CED7"/>
+                        <a:srgbClr val="F7D4DD"/>
                       </a:solidFill>
                       <a:prstDash val="solid"/>
                     </a:lnB>
                     <a:solidFill>
-                      <a:srgbClr val="F3CED7"/>
+                      <a:srgbClr val="F7D4DD"/>
                     </a:solidFill>
                   </a:tcPr>
                 </a:tc>
@@ -3865,30 +3865,30 @@
                   <a:tcPr anchor="ctr" marL="73152" marR="73152">
                     <a:lnL w="9525" cap="flat" cmpd="sng" algn="ctr">
                       <a:solidFill>
-                        <a:srgbClr val="F3CED7"/>
+                        <a:srgbClr val="F7D4DD"/>
                       </a:solidFill>
                       <a:prstDash val="solid"/>
                     </a:lnL>
                     <a:lnR w="9525" cap="flat" cmpd="sng" algn="ctr">
                       <a:solidFill>
-                        <a:srgbClr val="F3CED7"/>
+                        <a:srgbClr val="F7D4DD"/>
                       </a:solidFill>
                       <a:prstDash val="solid"/>
                     </a:lnR>
                     <a:lnT w="9525" cap="flat" cmpd="sng" algn="ctr">
                       <a:solidFill>
-                        <a:srgbClr val="F3CED7"/>
+                        <a:srgbClr val="F7D4DD"/>
                       </a:solidFill>
                       <a:prstDash val="solid"/>
                     </a:lnT>
                     <a:lnB w="9525" cap="flat" cmpd="sng" algn="ctr">
                       <a:solidFill>
-                        <a:srgbClr val="F3CED7"/>
+                        <a:srgbClr val="F7D4DD"/>
                       </a:solidFill>
                       <a:prstDash val="solid"/>
                     </a:lnB>
                     <a:solidFill>
-                      <a:srgbClr val="FAEFF2"/>
+                      <a:srgbClr val="FCF3F5"/>
                     </a:solidFill>
                   </a:tcPr>
                 </a:tc>
@@ -3903,7 +3903,7 @@
                       <a:r>
                         <a:rPr sz="1500" b="1">
                           <a:solidFill>
-                            <a:srgbClr val="9E2E4A"/>
+                            <a:srgbClr val="721D32"/>
                           </a:solidFill>
                         </a:rPr>
                         <a:t>좋아하는 것</a:t>
@@ -3913,30 +3913,30 @@
                   <a:tcPr anchor="ctr" marL="73152" marR="73152">
                     <a:lnL w="9525" cap="flat" cmpd="sng" algn="ctr">
                       <a:solidFill>
-                        <a:srgbClr val="F3CED7"/>
+                        <a:srgbClr val="F7D4DD"/>
                       </a:solidFill>
                       <a:prstDash val="solid"/>
                     </a:lnL>
                     <a:lnR w="9525" cap="flat" cmpd="sng" algn="ctr">
                       <a:solidFill>
-                        <a:srgbClr val="F3CED7"/>
+                        <a:srgbClr val="F7D4DD"/>
                       </a:solidFill>
                       <a:prstDash val="solid"/>
                     </a:lnR>
                     <a:lnT w="9525" cap="flat" cmpd="sng" algn="ctr">
                       <a:solidFill>
-                        <a:srgbClr val="F3CED7"/>
+                        <a:srgbClr val="F7D4DD"/>
                       </a:solidFill>
                       <a:prstDash val="solid"/>
                     </a:lnT>
                     <a:lnB w="9525" cap="flat" cmpd="sng" algn="ctr">
                       <a:solidFill>
-                        <a:srgbClr val="F3CED7"/>
+                        <a:srgbClr val="F7D4DD"/>
                       </a:solidFill>
                       <a:prstDash val="solid"/>
                     </a:lnB>
                     <a:solidFill>
-                      <a:srgbClr val="F3CED7"/>
+                      <a:srgbClr val="F7D4DD"/>
                     </a:solidFill>
                   </a:tcPr>
                 </a:tc>
@@ -3959,25 +3959,25 @@
                   <a:tcPr anchor="ctr" marL="73152" marR="73152">
                     <a:lnL w="9525" cap="flat" cmpd="sng" algn="ctr">
                       <a:solidFill>
-                        <a:srgbClr val="F3CED7"/>
+                        <a:srgbClr val="F7D4DD"/>
                       </a:solidFill>
                       <a:prstDash val="solid"/>
                     </a:lnL>
                     <a:lnR w="9525" cap="flat" cmpd="sng" algn="ctr">
                       <a:solidFill>
-                        <a:srgbClr val="F3CED7"/>
+                        <a:srgbClr val="F7D4DD"/>
                       </a:solidFill>
                       <a:prstDash val="solid"/>
                     </a:lnR>
                     <a:lnT w="9525" cap="flat" cmpd="sng" algn="ctr">
                       <a:solidFill>
-                        <a:srgbClr val="F3CED7"/>
+                        <a:srgbClr val="F7D4DD"/>
                       </a:solidFill>
                       <a:prstDash val="solid"/>
                     </a:lnT>
                     <a:lnB w="9525" cap="flat" cmpd="sng" algn="ctr">
                       <a:solidFill>
-                        <a:srgbClr val="F3CED7"/>
+                        <a:srgbClr val="F7D4DD"/>
                       </a:solidFill>
                       <a:prstDash val="solid"/>
                     </a:lnB>
@@ -3997,7 +3997,7 @@
                       <a:r>
                         <a:rPr sz="1500" b="1">
                           <a:solidFill>
-                            <a:srgbClr val="9E2E4A"/>
+                            <a:srgbClr val="721D32"/>
                           </a:solidFill>
                         </a:rPr>
                         <a:t>별명</a:t>
@@ -4007,30 +4007,30 @@
                   <a:tcPr anchor="ctr" marL="73152" marR="73152">
                     <a:lnL w="9525" cap="flat" cmpd="sng" algn="ctr">
                       <a:solidFill>
-                        <a:srgbClr val="F3CED7"/>
+                        <a:srgbClr val="F7D4DD"/>
                       </a:solidFill>
                       <a:prstDash val="solid"/>
                     </a:lnL>
                     <a:lnR w="9525" cap="flat" cmpd="sng" algn="ctr">
                       <a:solidFill>
-                        <a:srgbClr val="F3CED7"/>
+                        <a:srgbClr val="F7D4DD"/>
                       </a:solidFill>
                       <a:prstDash val="solid"/>
                     </a:lnR>
                     <a:lnT w="9525" cap="flat" cmpd="sng" algn="ctr">
                       <a:solidFill>
-                        <a:srgbClr val="F3CED7"/>
+                        <a:srgbClr val="F7D4DD"/>
                       </a:solidFill>
                       <a:prstDash val="solid"/>
                     </a:lnT>
                     <a:lnB w="9525" cap="flat" cmpd="sng" algn="ctr">
                       <a:solidFill>
-                        <a:srgbClr val="F3CED7"/>
+                        <a:srgbClr val="F7D4DD"/>
                       </a:solidFill>
                       <a:prstDash val="solid"/>
                     </a:lnB>
                     <a:solidFill>
-                      <a:srgbClr val="F3CED7"/>
+                      <a:srgbClr val="F7D4DD"/>
                     </a:solidFill>
                   </a:tcPr>
                 </a:tc>
@@ -4053,30 +4053,30 @@
                   <a:tcPr anchor="ctr" marL="73152" marR="73152">
                     <a:lnL w="9525" cap="flat" cmpd="sng" algn="ctr">
                       <a:solidFill>
-                        <a:srgbClr val="F3CED7"/>
+                        <a:srgbClr val="F7D4DD"/>
                       </a:solidFill>
                       <a:prstDash val="solid"/>
                     </a:lnL>
                     <a:lnR w="9525" cap="flat" cmpd="sng" algn="ctr">
                       <a:solidFill>
-                        <a:srgbClr val="F3CED7"/>
+                        <a:srgbClr val="F7D4DD"/>
                       </a:solidFill>
                       <a:prstDash val="solid"/>
                     </a:lnR>
                     <a:lnT w="9525" cap="flat" cmpd="sng" algn="ctr">
                       <a:solidFill>
-                        <a:srgbClr val="F3CED7"/>
+                        <a:srgbClr val="F7D4DD"/>
                       </a:solidFill>
                       <a:prstDash val="solid"/>
                     </a:lnT>
                     <a:lnB w="9525" cap="flat" cmpd="sng" algn="ctr">
                       <a:solidFill>
-                        <a:srgbClr val="F3CED7"/>
+                        <a:srgbClr val="F7D4DD"/>
                       </a:solidFill>
                       <a:prstDash val="solid"/>
                     </a:lnB>
                     <a:solidFill>
-                      <a:srgbClr val="FAEFF2"/>
+                      <a:srgbClr val="FCF3F5"/>
                     </a:solidFill>
                   </a:tcPr>
                 </a:tc>
@@ -4091,7 +4091,7 @@
                       <a:r>
                         <a:rPr sz="1500" b="1">
                           <a:solidFill>
-                            <a:srgbClr val="9E2E4A"/>
+                            <a:srgbClr val="721D32"/>
                           </a:solidFill>
                         </a:rPr>
                         <a:t>부모의 마음</a:t>
@@ -4101,30 +4101,30 @@
                   <a:tcPr anchor="ctr" marL="73152" marR="73152">
                     <a:lnL w="9525" cap="flat" cmpd="sng" algn="ctr">
                       <a:solidFill>
-                        <a:srgbClr val="F3CED7"/>
+                        <a:srgbClr val="F7D4DD"/>
                       </a:solidFill>
                       <a:prstDash val="solid"/>
                     </a:lnL>
                     <a:lnR w="9525" cap="flat" cmpd="sng" algn="ctr">
                       <a:solidFill>
-                        <a:srgbClr val="F3CED7"/>
+                        <a:srgbClr val="F7D4DD"/>
                       </a:solidFill>
                       <a:prstDash val="solid"/>
                     </a:lnR>
                     <a:lnT w="9525" cap="flat" cmpd="sng" algn="ctr">
                       <a:solidFill>
-                        <a:srgbClr val="F3CED7"/>
+                        <a:srgbClr val="F7D4DD"/>
                       </a:solidFill>
                       <a:prstDash val="solid"/>
                     </a:lnT>
                     <a:lnB w="9525" cap="flat" cmpd="sng" algn="ctr">
                       <a:solidFill>
-                        <a:srgbClr val="F3CED7"/>
+                        <a:srgbClr val="F7D4DD"/>
                       </a:solidFill>
                       <a:prstDash val="solid"/>
                     </a:lnB>
                     <a:solidFill>
-                      <a:srgbClr val="F3CED7"/>
+                      <a:srgbClr val="F7D4DD"/>
                     </a:solidFill>
                   </a:tcPr>
                 </a:tc>
@@ -4147,25 +4147,25 @@
                   <a:tcPr anchor="ctr" marL="73152" marR="73152">
                     <a:lnL w="9525" cap="flat" cmpd="sng" algn="ctr">
                       <a:solidFill>
-                        <a:srgbClr val="F3CED7"/>
+                        <a:srgbClr val="F7D4DD"/>
                       </a:solidFill>
                       <a:prstDash val="solid"/>
                     </a:lnL>
                     <a:lnR w="9525" cap="flat" cmpd="sng" algn="ctr">
                       <a:solidFill>
-                        <a:srgbClr val="F3CED7"/>
+                        <a:srgbClr val="F7D4DD"/>
                       </a:solidFill>
                       <a:prstDash val="solid"/>
                     </a:lnR>
                     <a:lnT w="9525" cap="flat" cmpd="sng" algn="ctr">
                       <a:solidFill>
-                        <a:srgbClr val="F3CED7"/>
+                        <a:srgbClr val="F7D4DD"/>
                       </a:solidFill>
                       <a:prstDash val="solid"/>
                     </a:lnT>
                     <a:lnB w="9525" cap="flat" cmpd="sng" algn="ctr">
                       <a:solidFill>
-                        <a:srgbClr val="F3CED7"/>
+                        <a:srgbClr val="F7D4DD"/>
                       </a:solidFill>
                       <a:prstDash val="solid"/>
                     </a:lnB>
@@ -4193,7 +4193,7 @@
     <p:bg>
       <p:bgPr>
         <a:solidFill>
-          <a:srgbClr val="D1617D"/>
+          <a:srgbClr val="DB3D65"/>
         </a:solidFill>
         <a:effectLst/>
       </p:bgPr>
@@ -4266,7 +4266,7 @@
             <a:r>
               <a:rPr sz="3000" b="1" i="0">
                 <a:solidFill>
-                  <a:srgbClr val="9E2E4A"/>
+                  <a:srgbClr val="721D32"/>
                 </a:solidFill>
               </a:rPr>
               <a:t>첫 번째 생일 사진</a:t>
@@ -4291,11 +4291,11 @@
             </a:avLst>
           </a:prstGeom>
           <a:solidFill>
-            <a:srgbClr val="F3CED7"/>
+            <a:srgbClr val="F7D4DD"/>
           </a:solidFill>
           <a:ln w="19050">
             <a:solidFill>
-              <a:srgbClr val="D1617D"/>
+              <a:srgbClr val="DB3D65"/>
             </a:solidFill>
             <a:prstDash val="dash"/>
           </a:ln>
@@ -4314,7 +4314,7 @@
             <a:r>
               <a:rPr sz="1400" b="0" i="0">
                 <a:solidFill>
-                  <a:srgbClr val="9E2E4A"/>
+                  <a:srgbClr val="721D32"/>
                 </a:solidFill>
               </a:rPr>
               <a:t>대표 사진 1</a:t>
@@ -4339,11 +4339,11 @@
             </a:avLst>
           </a:prstGeom>
           <a:solidFill>
-            <a:srgbClr val="F3CED7"/>
+            <a:srgbClr val="F7D4DD"/>
           </a:solidFill>
           <a:ln w="19050">
             <a:solidFill>
-              <a:srgbClr val="D1617D"/>
+              <a:srgbClr val="DB3D65"/>
             </a:solidFill>
             <a:prstDash val="dash"/>
           </a:ln>
@@ -4362,7 +4362,7 @@
             <a:r>
               <a:rPr sz="1400" b="0" i="0">
                 <a:solidFill>
-                  <a:srgbClr val="9E2E4A"/>
+                  <a:srgbClr val="721D32"/>
                 </a:solidFill>
               </a:rPr>
               <a:t>대표 사진 2</a:t>
@@ -4384,7 +4384,7 @@
     <p:bg>
       <p:bgPr>
         <a:solidFill>
-          <a:srgbClr val="D1617D"/>
+          <a:srgbClr val="DB3D65"/>
         </a:solidFill>
         <a:effectLst/>
       </p:bgPr>
@@ -4457,7 +4457,7 @@
             <a:r>
               <a:rPr sz="3000" b="1" i="0">
                 <a:solidFill>
-                  <a:srgbClr val="9E2E4A"/>
+                  <a:srgbClr val="721D32"/>
                 </a:solidFill>
               </a:rPr>
               <a:t>한 해의 순간들</a:t>
@@ -4482,11 +4482,11 @@
             </a:avLst>
           </a:prstGeom>
           <a:solidFill>
-            <a:srgbClr val="F3CED7"/>
+            <a:srgbClr val="F7D4DD"/>
           </a:solidFill>
           <a:ln w="19050">
             <a:solidFill>
-              <a:srgbClr val="D1617D"/>
+              <a:srgbClr val="DB3D65"/>
             </a:solidFill>
             <a:prstDash val="dash"/>
           </a:ln>
@@ -4505,7 +4505,7 @@
             <a:r>
               <a:rPr sz="1200" b="0" i="0">
                 <a:solidFill>
-                  <a:srgbClr val="9E2E4A"/>
+                  <a:srgbClr val="721D32"/>
                 </a:solidFill>
               </a:rPr>
               <a:t>사진 1</a:t>
@@ -4530,11 +4530,11 @@
             </a:avLst>
           </a:prstGeom>
           <a:solidFill>
-            <a:srgbClr val="F3CED7"/>
+            <a:srgbClr val="F7D4DD"/>
           </a:solidFill>
           <a:ln w="19050">
             <a:solidFill>
-              <a:srgbClr val="D1617D"/>
+              <a:srgbClr val="DB3D65"/>
             </a:solidFill>
             <a:prstDash val="dash"/>
           </a:ln>
@@ -4553,7 +4553,7 @@
             <a:r>
               <a:rPr sz="1200" b="0" i="0">
                 <a:solidFill>
-                  <a:srgbClr val="9E2E4A"/>
+                  <a:srgbClr val="721D32"/>
                 </a:solidFill>
               </a:rPr>
               <a:t>사진 2</a:t>
@@ -4578,11 +4578,11 @@
             </a:avLst>
           </a:prstGeom>
           <a:solidFill>
-            <a:srgbClr val="F3CED7"/>
+            <a:srgbClr val="F7D4DD"/>
           </a:solidFill>
           <a:ln w="19050">
             <a:solidFill>
-              <a:srgbClr val="D1617D"/>
+              <a:srgbClr val="DB3D65"/>
             </a:solidFill>
             <a:prstDash val="dash"/>
           </a:ln>
@@ -4601,7 +4601,7 @@
             <a:r>
               <a:rPr sz="1200" b="0" i="0">
                 <a:solidFill>
-                  <a:srgbClr val="9E2E4A"/>
+                  <a:srgbClr val="721D32"/>
                 </a:solidFill>
               </a:rPr>
               <a:t>사진 3</a:t>
@@ -4626,11 +4626,11 @@
             </a:avLst>
           </a:prstGeom>
           <a:solidFill>
-            <a:srgbClr val="F3CED7"/>
+            <a:srgbClr val="F7D4DD"/>
           </a:solidFill>
           <a:ln w="19050">
             <a:solidFill>
-              <a:srgbClr val="D1617D"/>
+              <a:srgbClr val="DB3D65"/>
             </a:solidFill>
             <a:prstDash val="dash"/>
           </a:ln>
@@ -4649,7 +4649,7 @@
             <a:r>
               <a:rPr sz="1200" b="0" i="0">
                 <a:solidFill>
-                  <a:srgbClr val="9E2E4A"/>
+                  <a:srgbClr val="721D32"/>
                 </a:solidFill>
               </a:rPr>
               <a:t>사진 4</a:t>
@@ -4674,11 +4674,11 @@
             </a:avLst>
           </a:prstGeom>
           <a:solidFill>
-            <a:srgbClr val="F3CED7"/>
+            <a:srgbClr val="F7D4DD"/>
           </a:solidFill>
           <a:ln w="19050">
             <a:solidFill>
-              <a:srgbClr val="D1617D"/>
+              <a:srgbClr val="DB3D65"/>
             </a:solidFill>
             <a:prstDash val="dash"/>
           </a:ln>
@@ -4697,7 +4697,7 @@
             <a:r>
               <a:rPr sz="1200" b="0" i="0">
                 <a:solidFill>
-                  <a:srgbClr val="9E2E4A"/>
+                  <a:srgbClr val="721D32"/>
                 </a:solidFill>
               </a:rPr>
               <a:t>사진 5</a:t>
@@ -4722,11 +4722,11 @@
             </a:avLst>
           </a:prstGeom>
           <a:solidFill>
-            <a:srgbClr val="F3CED7"/>
+            <a:srgbClr val="F7D4DD"/>
           </a:solidFill>
           <a:ln w="19050">
             <a:solidFill>
-              <a:srgbClr val="D1617D"/>
+              <a:srgbClr val="DB3D65"/>
             </a:solidFill>
             <a:prstDash val="dash"/>
           </a:ln>
@@ -4745,7 +4745,7 @@
             <a:r>
               <a:rPr sz="1200" b="0" i="0">
                 <a:solidFill>
-                  <a:srgbClr val="9E2E4A"/>
+                  <a:srgbClr val="721D32"/>
                 </a:solidFill>
               </a:rPr>
               <a:t>사진 6</a:t>
@@ -4767,7 +4767,7 @@
     <p:bg>
       <p:bgPr>
         <a:solidFill>
-          <a:srgbClr val="D1617D"/>
+          <a:srgbClr val="DB3D65"/>
         </a:solidFill>
         <a:effectLst/>
       </p:bgPr>
@@ -4840,7 +4840,7 @@
             <a:r>
               <a:rPr sz="3000" b="1" i="0">
                 <a:solidFill>
-                  <a:srgbClr val="9E2E4A"/>
+                  <a:srgbClr val="721D32"/>
                 </a:solidFill>
               </a:rPr>
               <a:t>사진 모음</a:t>
@@ -4865,11 +4865,11 @@
             </a:avLst>
           </a:prstGeom>
           <a:solidFill>
-            <a:srgbClr val="F3CED7"/>
+            <a:srgbClr val="F7D4DD"/>
           </a:solidFill>
           <a:ln w="19050">
             <a:solidFill>
-              <a:srgbClr val="D1617D"/>
+              <a:srgbClr val="DB3D65"/>
             </a:solidFill>
             <a:prstDash val="dash"/>
           </a:ln>
@@ -4888,7 +4888,7 @@
             <a:r>
               <a:rPr sz="1200" b="0" i="0">
                 <a:solidFill>
-                  <a:srgbClr val="9E2E4A"/>
+                  <a:srgbClr val="721D32"/>
                 </a:solidFill>
               </a:rPr>
               <a:t>사진 1</a:t>
@@ -4913,11 +4913,11 @@
             </a:avLst>
           </a:prstGeom>
           <a:solidFill>
-            <a:srgbClr val="F3CED7"/>
+            <a:srgbClr val="F7D4DD"/>
           </a:solidFill>
           <a:ln w="19050">
             <a:solidFill>
-              <a:srgbClr val="D1617D"/>
+              <a:srgbClr val="DB3D65"/>
             </a:solidFill>
             <a:prstDash val="dash"/>
           </a:ln>
@@ -4936,7 +4936,7 @@
             <a:r>
               <a:rPr sz="1200" b="0" i="0">
                 <a:solidFill>
-                  <a:srgbClr val="9E2E4A"/>
+                  <a:srgbClr val="721D32"/>
                 </a:solidFill>
               </a:rPr>
               <a:t>사진 2</a:t>
@@ -4961,11 +4961,11 @@
             </a:avLst>
           </a:prstGeom>
           <a:solidFill>
-            <a:srgbClr val="F3CED7"/>
+            <a:srgbClr val="F7D4DD"/>
           </a:solidFill>
           <a:ln w="19050">
             <a:solidFill>
-              <a:srgbClr val="D1617D"/>
+              <a:srgbClr val="DB3D65"/>
             </a:solidFill>
             <a:prstDash val="dash"/>
           </a:ln>
@@ -4984,7 +4984,7 @@
             <a:r>
               <a:rPr sz="1200" b="0" i="0">
                 <a:solidFill>
-                  <a:srgbClr val="9E2E4A"/>
+                  <a:srgbClr val="721D32"/>
                 </a:solidFill>
               </a:rPr>
               <a:t>사진 3</a:t>
@@ -5009,11 +5009,11 @@
             </a:avLst>
           </a:prstGeom>
           <a:solidFill>
-            <a:srgbClr val="F3CED7"/>
+            <a:srgbClr val="F7D4DD"/>
           </a:solidFill>
           <a:ln w="19050">
             <a:solidFill>
-              <a:srgbClr val="D1617D"/>
+              <a:srgbClr val="DB3D65"/>
             </a:solidFill>
             <a:prstDash val="dash"/>
           </a:ln>
@@ -5032,7 +5032,7 @@
             <a:r>
               <a:rPr sz="1200" b="0" i="0">
                 <a:solidFill>
-                  <a:srgbClr val="9E2E4A"/>
+                  <a:srgbClr val="721D32"/>
                 </a:solidFill>
               </a:rPr>
               <a:t>사진 4</a:t>
@@ -5057,11 +5057,11 @@
             </a:avLst>
           </a:prstGeom>
           <a:solidFill>
-            <a:srgbClr val="F3CED7"/>
+            <a:srgbClr val="F7D4DD"/>
           </a:solidFill>
           <a:ln w="19050">
             <a:solidFill>
-              <a:srgbClr val="D1617D"/>
+              <a:srgbClr val="DB3D65"/>
             </a:solidFill>
             <a:prstDash val="dash"/>
           </a:ln>
@@ -5080,7 +5080,7 @@
             <a:r>
               <a:rPr sz="1200" b="0" i="0">
                 <a:solidFill>
-                  <a:srgbClr val="9E2E4A"/>
+                  <a:srgbClr val="721D32"/>
                 </a:solidFill>
               </a:rPr>
               <a:t>사진 5</a:t>
@@ -5105,11 +5105,11 @@
             </a:avLst>
           </a:prstGeom>
           <a:solidFill>
-            <a:srgbClr val="F3CED7"/>
+            <a:srgbClr val="F7D4DD"/>
           </a:solidFill>
           <a:ln w="19050">
             <a:solidFill>
-              <a:srgbClr val="D1617D"/>
+              <a:srgbClr val="DB3D65"/>
             </a:solidFill>
             <a:prstDash val="dash"/>
           </a:ln>
@@ -5128,7 +5128,7 @@
             <a:r>
               <a:rPr sz="1200" b="0" i="0">
                 <a:solidFill>
-                  <a:srgbClr val="9E2E4A"/>
+                  <a:srgbClr val="721D32"/>
                 </a:solidFill>
               </a:rPr>
               <a:t>사진 6</a:t>
@@ -5153,11 +5153,11 @@
             </a:avLst>
           </a:prstGeom>
           <a:solidFill>
-            <a:srgbClr val="F3CED7"/>
+            <a:srgbClr val="F7D4DD"/>
           </a:solidFill>
           <a:ln w="19050">
             <a:solidFill>
-              <a:srgbClr val="D1617D"/>
+              <a:srgbClr val="DB3D65"/>
             </a:solidFill>
             <a:prstDash val="dash"/>
           </a:ln>
@@ -5176,7 +5176,7 @@
             <a:r>
               <a:rPr sz="1200" b="0" i="0">
                 <a:solidFill>
-                  <a:srgbClr val="9E2E4A"/>
+                  <a:srgbClr val="721D32"/>
                 </a:solidFill>
               </a:rPr>
               <a:t>사진 7</a:t>
@@ -5201,11 +5201,11 @@
             </a:avLst>
           </a:prstGeom>
           <a:solidFill>
-            <a:srgbClr val="F3CED7"/>
+            <a:srgbClr val="F7D4DD"/>
           </a:solidFill>
           <a:ln w="19050">
             <a:solidFill>
-              <a:srgbClr val="D1617D"/>
+              <a:srgbClr val="DB3D65"/>
             </a:solidFill>
             <a:prstDash val="dash"/>
           </a:ln>
@@ -5224,7 +5224,7 @@
             <a:r>
               <a:rPr sz="1200" b="0" i="0">
                 <a:solidFill>
-                  <a:srgbClr val="9E2E4A"/>
+                  <a:srgbClr val="721D32"/>
                 </a:solidFill>
               </a:rPr>
               <a:t>사진 8</a:t>
@@ -5304,7 +5304,7 @@
             <a:r>
               <a:rPr sz="3400" b="1" i="0">
                 <a:solidFill>
-                  <a:srgbClr val="9E2E4A"/>
+                  <a:srgbClr val="721D32"/>
                 </a:solidFill>
               </a:rPr>
               <a:t>와 주셔서 고맙습니다</a:t>
@@ -5342,7 +5342,7 @@
             <a:r>
               <a:rPr sz="1700" b="0" i="1">
                 <a:solidFill>
-                  <a:srgbClr val="9E2E4A"/>
+                  <a:srgbClr val="721D32"/>
                 </a:solidFill>
               </a:rPr>
               <a:t>아이가 한 살이 되었습니다</a:t>
@@ -5407,34 +5407,34 @@
         <a:sysClr val="window" lastClr="FFFFFF"/>
       </a:lt1>
       <a:dk2>
-        <a:srgbClr val="9E2E4A"/>
+        <a:srgbClr val="721D32"/>
       </a:dk2>
       <a:lt2>
-        <a:srgbClr val="FAEFF2"/>
+        <a:srgbClr val="FCF3F5"/>
       </a:lt2>
       <a:accent1>
-        <a:srgbClr val="D1617D"/>
+        <a:srgbClr val="DB3D65"/>
       </a:accent1>
       <a:accent2>
-        <a:srgbClr val="3B9151"/>
+        <a:srgbClr val="339941"/>
       </a:accent2>
       <a:accent3>
-        <a:srgbClr val="9E2E4A"/>
+        <a:srgbClr val="721D32"/>
       </a:accent3>
       <a:accent4>
-        <a:srgbClr val="F3CED7"/>
+        <a:srgbClr val="F7D4DD"/>
       </a:accent4>
       <a:accent5>
-        <a:srgbClr val="867967"/>
+        <a:srgbClr val="876B53"/>
       </a:accent5>
       <a:accent6>
-        <a:srgbClr val="C58292"/>
+        <a:srgbClr val="AA7784"/>
       </a:accent6>
       <a:hlink>
-        <a:srgbClr val="D1617D"/>
+        <a:srgbClr val="DB3D65"/>
       </a:hlink>
       <a:folHlink>
-        <a:srgbClr val="9E2E4A"/>
+        <a:srgbClr val="721D32"/>
       </a:folHlink>
     </a:clrScheme>
     <a:fontScheme name="Office">
